--- a/CalendarioAgo26/presentaciones/19_Modulo_re.pptx
+++ b/CalendarioAgo26/presentaciones/19_Modulo_re.pptx
@@ -168,37 +168,29 @@
 </p:presentation>
 </file>
 
-<file path=ppt/revisionInfo.xml><?xml version="1.0" encoding="utf-8"?>
-<p1510:revInfo xmlns:a="http://schemas.openxmlformats.org/drawingml/2006/main" xmlns:r="http://schemas.openxmlformats.org/officeDocument/2006/relationships" xmlns:p1510="http://schemas.microsoft.com/office/powerpoint/2015/10/main">
-  <p1510:revLst>
-    <p1510:client id="{D07A9F3C-159F-46D8-BEAA-8B748DC128E7}" v="1" dt="2026-03-05T23:14:10.695"/>
-  </p1510:revLst>
-</p1510:revInfo>
-</file>
-
 <file path=ppt/changesInfos/changesInfo1.xml><?xml version="1.0" encoding="utf-8"?>
 <pc:chgInfo xmlns:a="http://schemas.openxmlformats.org/drawingml/2006/main" xmlns:r="http://schemas.openxmlformats.org/officeDocument/2006/relationships" xmlns:ac="http://schemas.microsoft.com/office/drawing/2013/main/command" xmlns:pc="http://schemas.microsoft.com/office/powerpoint/2013/main/command">
   <pc:docChgLst>
     <pc:chgData name="Lizethe Pérez Fuertes" userId="4ae9ef87-2a7d-42f8-8dfa-0a501a9e2ff4" providerId="ADAL" clId="{FDDD45CB-1330-4033-A842-3D2746AFF7C7}"/>
     <pc:docChg chg="modSld modNotesMaster">
-      <pc:chgData name="Lizethe Pérez Fuertes" userId="4ae9ef87-2a7d-42f8-8dfa-0a501a9e2ff4" providerId="ADAL" clId="{FDDD45CB-1330-4033-A842-3D2746AFF7C7}" dt="2026-03-06T00:00:35.730" v="20" actId="1036"/>
+      <pc:chgData name="Lizethe Pérez Fuertes" userId="4ae9ef87-2a7d-42f8-8dfa-0a501a9e2ff4" providerId="ADAL" clId="{FDDD45CB-1330-4033-A842-3D2746AFF7C7}" dt="2026-08-11T16:29:18.143" v="22" actId="6549"/>
       <pc:docMkLst>
         <pc:docMk/>
       </pc:docMkLst>
       <pc:sldChg chg="modSp mod">
-        <pc:chgData name="Lizethe Pérez Fuertes" userId="4ae9ef87-2a7d-42f8-8dfa-0a501a9e2ff4" providerId="ADAL" clId="{FDDD45CB-1330-4033-A842-3D2746AFF7C7}" dt="2026-03-06T00:00:35.730" v="20" actId="1036"/>
+        <pc:chgData name="Lizethe Pérez Fuertes" userId="4ae9ef87-2a7d-42f8-8dfa-0a501a9e2ff4" providerId="ADAL" clId="{FDDD45CB-1330-4033-A842-3D2746AFF7C7}" dt="2026-08-11T16:29:18.143" v="22" actId="6549"/>
         <pc:sldMkLst>
           <pc:docMk/>
-          <pc:sldMk cId="1451682629" sldId="624"/>
+          <pc:sldMk cId="542782376" sldId="293"/>
         </pc:sldMkLst>
-        <pc:picChg chg="mod">
-          <ac:chgData name="Lizethe Pérez Fuertes" userId="4ae9ef87-2a7d-42f8-8dfa-0a501a9e2ff4" providerId="ADAL" clId="{FDDD45CB-1330-4033-A842-3D2746AFF7C7}" dt="2026-03-06T00:00:35.730" v="20" actId="1036"/>
-          <ac:picMkLst>
+        <pc:spChg chg="mod">
+          <ac:chgData name="Lizethe Pérez Fuertes" userId="4ae9ef87-2a7d-42f8-8dfa-0a501a9e2ff4" providerId="ADAL" clId="{FDDD45CB-1330-4033-A842-3D2746AFF7C7}" dt="2026-08-11T16:29:18.143" v="22" actId="6549"/>
+          <ac:spMkLst>
             <pc:docMk/>
-            <pc:sldMk cId="1451682629" sldId="624"/>
-            <ac:picMk id="3" creationId="{DCE94D24-C568-47E6-B6AA-854690DA14B5}"/>
-          </ac:picMkLst>
-        </pc:picChg>
+            <pc:sldMk cId="542782376" sldId="293"/>
+            <ac:spMk id="2" creationId="{00000000-0000-0000-0000-000000000000}"/>
+          </ac:spMkLst>
+        </pc:spChg>
       </pc:sldChg>
     </pc:docChg>
   </pc:docChgLst>
@@ -287,7 +279,7 @@
           <a:p>
             <a:fld id="{DDE721D5-655F-45D2-B717-3C4CD78C8568}" type="datetimeFigureOut">
               <a:rPr lang="es-MX" smtClean="0"/>
-              <a:t>05/03/2026</a:t>
+              <a:t>11/08/2026</a:t>
             </a:fld>
             <a:endParaRPr lang="es-MX" dirty="0"/>
           </a:p>
@@ -4180,7 +4172,7 @@
           <a:p>
             <a:fld id="{B3F3E716-CACC-4490-AD07-F24B6A68DE47}" type="datetimeFigureOut">
               <a:rPr lang="es-MX" smtClean="0"/>
-              <a:t>05/03/2026</a:t>
+              <a:t>11/08/2026</a:t>
             </a:fld>
             <a:endParaRPr lang="es-MX" dirty="0"/>
           </a:p>
@@ -4350,7 +4342,7 @@
           <a:p>
             <a:fld id="{B3F3E716-CACC-4490-AD07-F24B6A68DE47}" type="datetimeFigureOut">
               <a:rPr lang="es-MX" smtClean="0"/>
-              <a:t>05/03/2026</a:t>
+              <a:t>11/08/2026</a:t>
             </a:fld>
             <a:endParaRPr lang="es-MX" dirty="0"/>
           </a:p>
@@ -4530,7 +4522,7 @@
           <a:p>
             <a:fld id="{B3F3E716-CACC-4490-AD07-F24B6A68DE47}" type="datetimeFigureOut">
               <a:rPr lang="es-MX" smtClean="0"/>
-              <a:t>05/03/2026</a:t>
+              <a:t>11/08/2026</a:t>
             </a:fld>
             <a:endParaRPr lang="es-MX" dirty="0"/>
           </a:p>
@@ -4683,7 +4675,7 @@
           <a:p>
             <a:fld id="{1D8BD707-D9CF-40AE-B4C6-C98DA3205C09}" type="datetimeFigureOut">
               <a:rPr lang="en-US" smtClean="0"/>
-              <a:t>3/5/2026</a:t>
+              <a:t>8/11/2026</a:t>
             </a:fld>
             <a:endParaRPr lang="en-US" dirty="0"/>
           </a:p>
@@ -4843,7 +4835,7 @@
           <a:p>
             <a:fld id="{B3F3E716-CACC-4490-AD07-F24B6A68DE47}" type="datetimeFigureOut">
               <a:rPr lang="es-MX" smtClean="0"/>
-              <a:t>05/03/2026</a:t>
+              <a:t>11/08/2026</a:t>
             </a:fld>
             <a:endParaRPr lang="es-MX" dirty="0"/>
           </a:p>
@@ -5089,7 +5081,7 @@
           <a:p>
             <a:fld id="{B3F3E716-CACC-4490-AD07-F24B6A68DE47}" type="datetimeFigureOut">
               <a:rPr lang="es-MX" smtClean="0"/>
-              <a:t>05/03/2026</a:t>
+              <a:t>11/08/2026</a:t>
             </a:fld>
             <a:endParaRPr lang="es-MX" dirty="0"/>
           </a:p>
@@ -5377,7 +5369,7 @@
           <a:p>
             <a:fld id="{B3F3E716-CACC-4490-AD07-F24B6A68DE47}" type="datetimeFigureOut">
               <a:rPr lang="es-MX" smtClean="0"/>
-              <a:t>05/03/2026</a:t>
+              <a:t>11/08/2026</a:t>
             </a:fld>
             <a:endParaRPr lang="es-MX" dirty="0"/>
           </a:p>
@@ -5799,7 +5791,7 @@
           <a:p>
             <a:fld id="{B3F3E716-CACC-4490-AD07-F24B6A68DE47}" type="datetimeFigureOut">
               <a:rPr lang="es-MX" smtClean="0"/>
-              <a:t>05/03/2026</a:t>
+              <a:t>11/08/2026</a:t>
             </a:fld>
             <a:endParaRPr lang="es-MX" dirty="0"/>
           </a:p>
@@ -5917,7 +5909,7 @@
           <a:p>
             <a:fld id="{B3F3E716-CACC-4490-AD07-F24B6A68DE47}" type="datetimeFigureOut">
               <a:rPr lang="es-MX" smtClean="0"/>
-              <a:t>05/03/2026</a:t>
+              <a:t>11/08/2026</a:t>
             </a:fld>
             <a:endParaRPr lang="es-MX" dirty="0"/>
           </a:p>
@@ -6012,7 +6004,7 @@
           <a:p>
             <a:fld id="{B3F3E716-CACC-4490-AD07-F24B6A68DE47}" type="datetimeFigureOut">
               <a:rPr lang="es-MX" smtClean="0"/>
-              <a:t>05/03/2026</a:t>
+              <a:t>11/08/2026</a:t>
             </a:fld>
             <a:endParaRPr lang="es-MX" dirty="0"/>
           </a:p>
@@ -6289,7 +6281,7 @@
           <a:p>
             <a:fld id="{B3F3E716-CACC-4490-AD07-F24B6A68DE47}" type="datetimeFigureOut">
               <a:rPr lang="es-MX" smtClean="0"/>
-              <a:t>05/03/2026</a:t>
+              <a:t>11/08/2026</a:t>
             </a:fld>
             <a:endParaRPr lang="es-MX" dirty="0"/>
           </a:p>
@@ -6542,7 +6534,7 @@
           <a:p>
             <a:fld id="{B3F3E716-CACC-4490-AD07-F24B6A68DE47}" type="datetimeFigureOut">
               <a:rPr lang="es-MX" smtClean="0"/>
-              <a:t>05/03/2026</a:t>
+              <a:t>11/08/2026</a:t>
             </a:fld>
             <a:endParaRPr lang="es-MX" dirty="0"/>
           </a:p>
@@ -6755,7 +6747,7 @@
           <a:p>
             <a:fld id="{B3F3E716-CACC-4490-AD07-F24B6A68DE47}" type="datetimeFigureOut">
               <a:rPr lang="es-MX" smtClean="0"/>
-              <a:t>05/03/2026</a:t>
+              <a:t>11/08/2026</a:t>
             </a:fld>
             <a:endParaRPr lang="es-MX" dirty="0"/>
           </a:p>
@@ -7167,7 +7159,7 @@
                   </a:schemeClr>
                 </a:solidFill>
               </a:rPr>
-              <a:t>TI 3001 C</a:t>
+              <a:t>TI 3008 C</a:t>
             </a:r>
             <a:br>
               <a:rPr lang="es-MX" sz="3200" dirty="0">
